--- a/docs/ea-renewal-proposal/동아그룹_Microsoft_EA_갱신제안서_2026.pptx
+++ b/docs/ea-renewal-proposal/동아그룹_Microsoft_EA_갱신제안서_2026.pptx
@@ -3287,6 +3287,46 @@
       <p:sp>
         <p:nvSpPr>
           <p:cNvPr id="6" name="TextBox 5"/>
+          <p:cNvSpPr txBox="1"/>
+          <p:nvPr/>
+        </p:nvSpPr>
+        <p:spPr>
+          <a:xfrm>
+            <a:off x="914400" y="3611880"/>
+            <a:ext cx="10332720" cy="457200"/>
+          </a:xfrm>
+          <a:prstGeom prst="rect">
+            <a:avLst/>
+          </a:prstGeom>
+          <a:noFill/>
+        </p:spPr>
+        <p:txBody>
+          <a:bodyPr wrap="square" anchor="t" lIns="0" rIns="0" tIns="0" bIns="0">
+            <a:spAutoFit/>
+          </a:bodyPr>
+          <a:lstStyle/>
+          <a:p>
+            <a:pPr algn="l">
+              <a:spcAft>
+                <a:spcPts val="400"/>
+              </a:spcAft>
+            </a:pPr>
+            <a:r>
+              <a:rPr sz="1400" b="0" i="0">
+                <a:solidFill>
+                  <a:srgbClr val="BDD7EE"/>
+                </a:solidFill>
+                <a:latin typeface="맑은 고딕"/>
+                <a:ea typeface="맑은 고딕"/>
+              </a:rPr>
+              <a:t>지난 3년간 쌓아온 신뢰를 바탕으로, 다음 성장 단계까지 함께하겠습니다.</a:t>
+            </a:r>
+          </a:p>
+        </p:txBody>
+      </p:sp>
+      <p:sp>
+        <p:nvSpPr>
+          <p:cNvPr id="7" name="TextBox 6"/>
           <p:cNvSpPr txBox="1"/>
           <p:nvPr/>
         </p:nvSpPr>
@@ -8457,7 +8497,7 @@
                 <a:latin typeface="맑은 고딕"/>
                 <a:ea typeface="맑은 고딕"/>
               </a:rPr>
-              <a:t>Renewal 전사 동결</a:t>
+              <a:t>Renewal 100% 동결</a:t>
             </a:r>
           </a:p>
         </p:txBody>
@@ -8497,7 +8537,7 @@
                 <a:latin typeface="맑은 고딕"/>
                 <a:ea typeface="맑은 고딕"/>
               </a:rPr>
-              <a:t>4개사 모두 기존 인원 갱신 단가·금액을</a:t>
+              <a:t>4개사 전 인원의 갱신 단가·금액이</a:t>
             </a:r>
           </a:p>
           <a:p>
@@ -8514,7 +8554,7 @@
                 <a:latin typeface="맑은 고딕"/>
                 <a:ea typeface="맑은 고딕"/>
               </a:rPr>
-              <a:t>전년과 동일하게 동결 (증감 0%)</a:t>
+              <a:t>전년과 동일 — 예산 변동 리스크 없음</a:t>
             </a:r>
           </a:p>
         </p:txBody>
@@ -8684,7 +8724,7 @@
                 <a:latin typeface="맑은 고딕"/>
                 <a:ea typeface="맑은 고딕"/>
               </a:rPr>
-              <a:t>증가액 1.1억원은 전액 신규 인원 정산분.</a:t>
+              <a:t>26Y 증가액 1.1억원은 전액 신규 인원 정산분,</a:t>
             </a:r>
           </a:p>
           <a:p>
@@ -8701,7 +8741,7 @@
                 <a:latin typeface="맑은 고딕"/>
                 <a:ea typeface="맑은 고딕"/>
               </a:rPr>
-              <a:t>계약 단가 인상 요인은 없음</a:t>
+              <a:t>계약 단가 인상 요인은 전혀 없음</a:t>
             </a:r>
           </a:p>
         </p:txBody>
@@ -8831,7 +8871,7 @@
                 <a:latin typeface="맑은 고딕"/>
                 <a:ea typeface="맑은 고딕"/>
               </a:rPr>
-              <a:t>사업 성장의 반영</a:t>
+              <a:t>성장이 만든 증가</a:t>
             </a:r>
           </a:p>
         </p:txBody>
@@ -8871,7 +8911,7 @@
                 <a:latin typeface="맑은 고딕"/>
                 <a:ea typeface="맑은 고딕"/>
               </a:rPr>
-              <a:t>동아에스티(+168명)·에스티젠바이오(+214명)의</a:t>
+              <a:t>동아에스티 +168명 · 에스티젠바이오 +214명,</a:t>
             </a:r>
           </a:p>
           <a:p>
@@ -8888,7 +8928,7 @@
                 <a:latin typeface="맑은 고딕"/>
                 <a:ea typeface="맑은 고딕"/>
               </a:rPr>
-              <a:t>사업 확장에 따른 사용 규모 확대</a:t>
+              <a:t>사업 확장이 낳은 자연스러운 결과</a:t>
             </a:r>
           </a:p>
         </p:txBody>
@@ -10445,7 +10485,7 @@
                           <a:latin typeface="맑은 고딕"/>
                           <a:ea typeface="맑은 고딕"/>
                         </a:rPr>
-                        <a:t>+9.0%</a:t>
+                        <a:t>+9.1%</a:t>
                       </a:r>
                     </a:p>
                   </a:txBody>
@@ -11020,7 +11060,7 @@
                 <a:latin typeface="맑은 고딕"/>
                 <a:ea typeface="맑은 고딕"/>
               </a:rPr>
-              <a:t>· 4개사 모두 Renewal(기존 인원)은 전년 금액 그대로 동결되었으며, 증가액 111,676,600원은 전액 25년 True-up 404명(에스티 168 · 제약 22 · 에스티젠 214)의 신규 정산분입니다.</a:t>
+              <a:t>· 4개사 모두 Renewal(기존 인원)은 전년 금액 그대로 동결되었으며, 증가액 111,676,600원은 전액 25년 True-up 404명(동아에스티 168 · 동아제약 22 · 에스티젠바이오 214)의 신규 정산분입니다.</a:t>
             </a:r>
           </a:p>
         </p:txBody>
@@ -12091,7 +12131,7 @@
                 <a:latin typeface="맑은 고딕"/>
                 <a:ea typeface="맑은 고딕"/>
               </a:rPr>
-              <a:t>·  25년 신규 True-up 인원이 없어 26Y 금액은 전년과 동일하게 동결됩니다.</a:t>
+              <a:t>·  Renewal 88명과 기존 True-up 4명(24년) 모두 전년과 동일한 조건으로 유지되어 26Y 금액이 100% 동결됩니다.</a:t>
             </a:r>
           </a:p>
           <a:p>
@@ -12108,7 +12148,7 @@
                 <a:latin typeface="맑은 고딕"/>
                 <a:ea typeface="맑은 고딕"/>
               </a:rPr>
-              <a:t>·  Renewal 88명 및 기존 True-up 4명(24년)의 계약 조건이 그대로 유지됩니다.</a:t>
+              <a:t>·  25년 한 해 신규 True-up 인원이 발생하지 않아, 지주회사의 안정적인 조직 운영 기조를 그대로 보여줍니다.</a:t>
             </a:r>
           </a:p>
           <a:p>
@@ -12125,7 +12165,7 @@
                 <a:latin typeface="맑은 고딕"/>
                 <a:ea typeface="맑은 고딕"/>
               </a:rPr>
-              <a:t>·  3년 차 갱신에도 단가 인상 없이 안정적인 IT 예산 운영이 가능합니다.</a:t>
+              <a:t>·  3년 차 갱신에도 단가 인상 없이 기존 조건이 이어져, 예측 가능한 IT 예산 운영이 가능합니다.</a:t>
             </a:r>
           </a:p>
         </p:txBody>
@@ -12492,7 +12532,7 @@
                 <a:latin typeface="맑은 고딕"/>
                 <a:ea typeface="맑은 고딕"/>
               </a:rPr>
-              <a:t>+9.0%</a:t>
+              <a:t>+9.1%</a:t>
             </a:r>
           </a:p>
           <a:p>
@@ -13016,7 +13056,7 @@
                           <a:latin typeface="맑은 고딕"/>
                           <a:ea typeface="맑은 고딕"/>
                         </a:rPr>
-                        <a:t>+9.0%</a:t>
+                        <a:t>+9.1%</a:t>
                       </a:r>
                     </a:p>
                   </a:txBody>
@@ -13196,7 +13236,7 @@
                 <a:latin typeface="맑은 고딕"/>
                 <a:ea typeface="맑은 고딕"/>
               </a:rPr>
-              <a:t>·  Renewal 1,103명 금액은 전년과 동일하게 전액 동결되었습니다.</a:t>
+              <a:t>·  Renewal 1,103명 금액은 전년과 동일하게 전액 동결되어, 기존 라이선스 비용 부담은 그대로입니다.</a:t>
             </a:r>
           </a:p>
           <a:p>
@@ -13213,7 +13253,7 @@
                 <a:latin typeface="맑은 고딕"/>
                 <a:ea typeface="맑은 고딕"/>
               </a:rPr>
-              <a:t>·  증가분 44,990,400원은 전액 25년 True-up 168명의 신규 정산분으로, 임직원 증가 등 사업 확장에 따른 사용 규모 확대를 반영합니다.</a:t>
+              <a:t>·  26Y 증가액 44,990,400원은 100% 25년 True-up 168명의 신규 정산분 — 비용 인상이 아니라 임직원 증가에 따른 사업 확장의 결과입니다.</a:t>
             </a:r>
           </a:p>
           <a:p>
@@ -13230,7 +13270,7 @@
                 <a:latin typeface="맑은 고딕"/>
                 <a:ea typeface="맑은 고딕"/>
               </a:rPr>
-              <a:t>·  26Y 기준 총 1,341EA로 확대되어, 전사 표준 협업 환경이 성장 조직 전체에 일관되게 적용됩니다.</a:t>
+              <a:t>·  26Y 기준 총 1,341EA로 확대되어, 성장하는 조직 전체에 전사 표준 협업 환경을 빠짐없이 확장 적용합니다.</a:t>
             </a:r>
           </a:p>
         </p:txBody>
@@ -14301,7 +14341,7 @@
                 <a:latin typeface="맑은 고딕"/>
                 <a:ea typeface="맑은 고딕"/>
               </a:rPr>
-              <a:t>·  Renewal 576명 금액은 전년과 동일하게 전액 동결되었습니다.</a:t>
+              <a:t>·  Renewal 576명 금액은 전년과 동일하게 전액 동결되어, 기존 계약 조건에는 변동이 없습니다.</a:t>
             </a:r>
           </a:p>
           <a:p>
@@ -14318,7 +14358,7 @@
                 <a:latin typeface="맑은 고딕"/>
                 <a:ea typeface="맑은 고딕"/>
               </a:rPr>
-              <a:t>·  증가분 7,172,200원은 25년 True-up 22명의 신규 정산분으로, 실사용 증가분만 반영된 최소 수준의 조정입니다.</a:t>
+              <a:t>·  26Y 증가액 7,172,200원은 25년 True-up 22명의 신규 정산분으로, 실사용 증가분만 최소 수준으로 반영되었습니다.</a:t>
             </a:r>
           </a:p>
           <a:p>
@@ -14335,7 +14375,7 @@
                 <a:latin typeface="맑은 고딕"/>
                 <a:ea typeface="맑은 고딕"/>
               </a:rPr>
-              <a:t>·  26Y 기준 총 709EA로, 전년 대비 2.6%의 안정적인 증가율을 유지합니다.</a:t>
+              <a:t>·  26Y 기준 총 709EA로, 전년 대비 2.6%의 안정적인 증가 흐름을 유지합니다.</a:t>
             </a:r>
           </a:p>
         </p:txBody>
@@ -15406,7 +15446,7 @@
                 <a:latin typeface="맑은 고딕"/>
                 <a:ea typeface="맑은 고딕"/>
               </a:rPr>
-              <a:t>·  Renewal 148명 금액은 전년과 동일하게 전액 동결되었습니다.</a:t>
+              <a:t>·  Renewal 148명 금액은 전년과 동일하게 전액 동결되어, 기존 계약 조건에는 변동이 없습니다.</a:t>
             </a:r>
           </a:p>
           <a:p>
@@ -15423,7 +15463,7 @@
                 <a:latin typeface="맑은 고딕"/>
                 <a:ea typeface="맑은 고딕"/>
               </a:rPr>
-              <a:t>·  증가분 59,514,000원은 전액 25년 True-up 214명의 신규 정산분입니다. 사업 확장에 따른 대규모 인력 확충이 그대로 반영된 결과로, 조직 성장을 보여주는 지표입니다.</a:t>
+              <a:t>·  26Y 증가액 59,514,000원은 100% 25년 True-up 214명의 신규 정산분 — 바이오의약품 사업의 본격적인 확장과 대규모 채용이 만들어낸 결과입니다.</a:t>
             </a:r>
           </a:p>
           <a:p>
@@ -15440,7 +15480,7 @@
                 <a:latin typeface="맑은 고딕"/>
                 <a:ea typeface="맑은 고딕"/>
               </a:rPr>
-              <a:t>·  26Y 기준 총 430EA로 전년 대비 43% 이상 규모가 확대되어, 성장 단계에 맞는 표준화된 업무 환경 확보가 더욱 중요해졌습니다.</a:t>
+              <a:t>·  26Y 기준 총 430EA로 전년 대비 43% 이상 확대되어, 4개사 중 가장 가파른 성장세를 보여줍니다.</a:t>
             </a:r>
           </a:p>
         </p:txBody>

--- a/docs/ea-renewal-proposal/동아그룹_Microsoft_EA_갱신제안서_2026.pptx
+++ b/docs/ea-renewal-proposal/동아그룹_Microsoft_EA_갱신제안서_2026.pptx
@@ -3292,8 +3292,8 @@
         </p:nvSpPr>
         <p:spPr>
           <a:xfrm>
-            <a:off x="914400" y="3611880"/>
-            <a:ext cx="10332720" cy="457200"/>
+            <a:off x="914400" y="3794760"/>
+            <a:ext cx="10332720" cy="365760"/>
           </a:xfrm>
           <a:prstGeom prst="rect">
             <a:avLst/>
@@ -6238,14 +6238,31 @@
               </a:spcAft>
             </a:pPr>
             <a:r>
-              <a:rPr sz="1500" b="0" i="0">
+              <a:rPr sz="1600" b="1" i="0">
                 <a:solidFill>
                   <a:srgbClr val="BDD7EE"/>
                 </a:solidFill>
                 <a:latin typeface="맑은 고딕"/>
                 <a:ea typeface="맑은 고딕"/>
               </a:rPr>
-              <a:t>동아그룹 4개사의 안정적인 Microsoft 업무 환경과 사업 성장을 계속 지원하겠습니다.</a:t>
+              <a:t>지난 3년간 쌓아온 신뢰를 바탕으로, 동아그룹의 다음 성장 단계까지 함께하겠습니다.</a:t>
+            </a:r>
+          </a:p>
+          <a:p>
+            <a:pPr algn="l">
+              <a:spcAft>
+                <a:spcPts val="1000"/>
+              </a:spcAft>
+            </a:pPr>
+            <a:r>
+              <a:rPr sz="1300" b="0" i="0">
+                <a:solidFill>
+                  <a:srgbClr val="9DC3E6"/>
+                </a:solidFill>
+                <a:latin typeface="맑은 고딕"/>
+                <a:ea typeface="맑은 고딕"/>
+              </a:rPr>
+              <a:t>안정적인 Microsoft 업무 환경으로 4개사의 지속적인 사업 성장을 뒷받침하겠습니다.</a:t>
             </a:r>
           </a:p>
           <a:p>
